--- a/M2/Cor-Paul_mtg/2_2026_4_8/slide.pptx
+++ b/M2/Cor-Paul_mtg/2_2026_4_8/slide.pptx
@@ -1059,7 +1059,7 @@
             </a:r>
             <a:r>
               <a:rPr kumimoji="1" lang="en" altLang="ja-JP" dirty="0"/>
-              <a:t>As shown in the visualization (pointing to the three marks)</a:t>
+              <a:t>As shown in the visualization</a:t>
             </a:r>
             <a:r>
               <a:rPr kumimoji="1" lang="ja-JP" altLang="en"/>
